--- a/assets/pptx/catalog-2765.pptx
+++ b/assets/pptx/catalog-2765.pptx
@@ -3962,7 +3962,7 @@
                 <a:ea typeface="Ebrima"/>
                 <a:cs typeface="Ebrima"/>
               </a:rPr>
-              <a:t>ላመልክህ የተገባህ ጌታ አንተ ነህ (4x)</a:t>
+              <a:t>ላመልክህ የተገባህ ጌታ አንተ ነህ 4x</a:t>
             </a:r>
           </a:p>
         </p:txBody>
@@ -4230,7 +4230,7 @@
                 <a:ea typeface="Ebrima"/>
                 <a:cs typeface="Ebrima"/>
               </a:rPr>
-              <a:t>ጌታ (4x) ምሥጋናዬን እንካ</a:t>
+              <a:t>ጌታ 4x ምሥጋናዬን እንካ</a:t>
             </a:r>
           </a:p>
         </p:txBody>
@@ -4297,7 +4297,7 @@
                 <a:ea typeface="Ebrima"/>
                 <a:cs typeface="Ebrima"/>
               </a:rPr>
-              <a:t>ጌታ (4x) አምልኮዬን እንካ</a:t>
+              <a:t>ጌታ 4x አምልኮዬን እንካ</a:t>
             </a:r>
           </a:p>
         </p:txBody>
@@ -4364,7 +4364,7 @@
                 <a:ea typeface="Ebrima"/>
                 <a:cs typeface="Ebrima"/>
               </a:rPr>
-              <a:t>ጌታ (4x) ምሥጋናዬን እንካ</a:t>
+              <a:t>ጌታ 4x ምሥጋናዬን እንካ</a:t>
             </a:r>
           </a:p>
         </p:txBody>
@@ -4431,7 +4431,7 @@
                 <a:ea typeface="Ebrima"/>
                 <a:cs typeface="Ebrima"/>
               </a:rPr>
-              <a:t>ጌታ (4x) አምልኮዬን እንካ</a:t>
+              <a:t>ጌታ 4x አምልኮዬን እንካ</a:t>
             </a:r>
           </a:p>
         </p:txBody>
@@ -4699,7 +4699,7 @@
                 <a:ea typeface="Ebrima"/>
                 <a:cs typeface="Ebrima"/>
               </a:rPr>
-              <a:t>ጌታ (4x) ምሥጋናዬን እንካ</a:t>
+              <a:t>ጌታ 4x ምሥጋናዬን እንካ</a:t>
             </a:r>
           </a:p>
         </p:txBody>
@@ -5436,7 +5436,7 @@
                 <a:ea typeface="Ebrima"/>
                 <a:cs typeface="Ebrima"/>
               </a:rPr>
-              <a:t>ጌታ (4x) አምልኮዬን እንካ</a:t>
+              <a:t>ጌታ 4x አምልኮዬን እንካ</a:t>
             </a:r>
           </a:p>
         </p:txBody>
@@ -5704,7 +5704,7 @@
                 <a:ea typeface="Ebrima"/>
                 <a:cs typeface="Ebrima"/>
               </a:rPr>
-              <a:t>ላመልክህ የተገባህ ጌታ አንተ ነህ (4x)</a:t>
+              <a:t>ላመልክህ የተገባህ ጌታ አንተ ነህ 4x</a:t>
             </a:r>
           </a:p>
         </p:txBody>
@@ -5771,7 +5771,7 @@
                 <a:ea typeface="Ebrima"/>
                 <a:cs typeface="Ebrima"/>
               </a:rPr>
-              <a:t>ጌታ (4x) ምሥጋናዬን እንካ</a:t>
+              <a:t>ጌታ 4x ምሥጋናዬን እንካ</a:t>
             </a:r>
           </a:p>
         </p:txBody>
@@ -5838,7 +5838,7 @@
                 <a:ea typeface="Ebrima"/>
                 <a:cs typeface="Ebrima"/>
               </a:rPr>
-              <a:t>ጌታ (4x) አምልኮዬን እንካ</a:t>
+              <a:t>ጌታ 4x አምልኮዬን እንካ</a:t>
             </a:r>
           </a:p>
         </p:txBody>
@@ -5905,7 +5905,7 @@
                 <a:ea typeface="Ebrima"/>
                 <a:cs typeface="Ebrima"/>
               </a:rPr>
-              <a:t>ጌታ (4x) ምሥጋናዬን እንካ</a:t>
+              <a:t>ጌታ 4x ምሥጋናዬን እንካ</a:t>
             </a:r>
           </a:p>
         </p:txBody>
@@ -5972,7 +5972,7 @@
                 <a:ea typeface="Ebrima"/>
                 <a:cs typeface="Ebrima"/>
               </a:rPr>
-              <a:t>ጌታ (4x) አምልኮዬን እንካ</a:t>
+              <a:t>ጌታ 4x አምልኮዬን እንካ</a:t>
             </a:r>
           </a:p>
         </p:txBody>
@@ -6106,7 +6106,7 @@
                 <a:ea typeface="Ebrima"/>
                 <a:cs typeface="Ebrima"/>
               </a:rPr>
-              <a:t>ይሄው ይሄው አምልኮዬ ጌታ የአንተ ነው (2x)</a:t>
+              <a:t>ይሄው ይሄው አምልኮዬ ጌታ የአንተ ነው 2x</a:t>
             </a:r>
           </a:p>
         </p:txBody>
@@ -6173,7 +6173,7 @@
                 <a:ea typeface="Ebrima"/>
                 <a:cs typeface="Ebrima"/>
               </a:rPr>
-              <a:t>ጌታ (4x) ምሥጋናዬን እንካ</a:t>
+              <a:t>ጌታ 4x ምሥጋናዬን እንካ</a:t>
             </a:r>
           </a:p>
         </p:txBody>
@@ -6240,7 +6240,7 @@
                 <a:ea typeface="Ebrima"/>
                 <a:cs typeface="Ebrima"/>
               </a:rPr>
-              <a:t>ጌታ (4x) ምሥጋናዬን እንካ</a:t>
+              <a:t>ጌታ 4x ምሥጋናዬን እንካ</a:t>
             </a:r>
           </a:p>
         </p:txBody>
@@ -6307,7 +6307,7 @@
                 <a:ea typeface="Ebrima"/>
                 <a:cs typeface="Ebrima"/>
               </a:rPr>
-              <a:t>ጌታ (4x) አምልኮዬን እንካ</a:t>
+              <a:t>ጌታ 4x አምልኮዬን እንካ</a:t>
             </a:r>
           </a:p>
         </p:txBody>
@@ -6374,7 +6374,7 @@
                 <a:ea typeface="Ebrima"/>
                 <a:cs typeface="Ebrima"/>
               </a:rPr>
-              <a:t>ጌታ (4x) ምሥጋናዬን እንካ</a:t>
+              <a:t>ጌታ 4x ምሥጋናዬን እንካ</a:t>
             </a:r>
           </a:p>
         </p:txBody>
@@ -6441,7 +6441,7 @@
                 <a:ea typeface="Ebrima"/>
                 <a:cs typeface="Ebrima"/>
               </a:rPr>
-              <a:t>ጌታ (4x) አምልኮዬን እንካ</a:t>
+              <a:t>ጌታ 4x አምልኮዬን እንካ</a:t>
             </a:r>
           </a:p>
         </p:txBody>
@@ -6508,7 +6508,7 @@
                 <a:ea typeface="Ebrima"/>
                 <a:cs typeface="Ebrima"/>
               </a:rPr>
-              <a:t>ጌታ (4x) አምልኮዬን እንካ</a:t>
+              <a:t>ጌታ 4x አምልኮዬን እንካ</a:t>
             </a:r>
           </a:p>
         </p:txBody>
